--- a/webinars/Thrive55_Week0_Kickoff_Zoom.pptx
+++ b/webinars/Thrive55_Week0_Kickoff_Zoom.pptx
@@ -4939,7 +4939,7 @@
                 </a:solidFill>
                 <a:latin typeface="Arial"/>
               </a:rPr>
-              <a:t>FACILITATOR SETUP — HIDE THIS SLIDE BEFORE YOU PRESENT</a:t>
+              <a:t>FACILITATOR SETUP · HIDE THIS SLIDE BEFORE YOU PRESENT</a:t>
             </a:r>
           </a:p>
         </p:txBody>
@@ -5055,10 +5055,18 @@
           </a:bodyPr>
           <a:lstStyle/>
           <a:p>
-            <a:pPr>
+            <a:pPr marL="274638" indent="-274638">
+              <a:lnSpc>
+                <a:spcPct val="108000"/>
+              </a:lnSpc>
               <a:spcAft>
-                <a:spcPts val="1000"/>
+                <a:spcPts val="1100"/>
               </a:spcAft>
+              <a:buClr>
+                <a:srgbClr val="1B3A5B"/>
+              </a:buClr>
+              <a:buFont typeface="Arial"/>
+              <a:buChar char="•"/>
             </a:pPr>
             <a:r>
               <a:rPr sz="1600" b="1" i="0">
@@ -5067,7 +5075,7 @@
                 </a:solidFill>
                 <a:latin typeface="Arial"/>
               </a:rPr>
-              <a:t>•  Create Poll 1 in advance:</a:t>
+              <a:t>Create Poll 1 in advance:</a:t>
             </a:r>
             <a:r>
               <a:rPr sz="1600" b="0" i="0">
@@ -5076,14 +5084,22 @@
                 </a:solidFill>
                 <a:latin typeface="Arial"/>
               </a:rPr>
-              <a:t> Zoom web portal → your meeting → Polls. Question: “You still love nursing. You also dread the next shift. Does that describe you?” Answers: Yes, most days / Some days / Not yet — but I'm curious.</a:t>
-            </a:r>
-          </a:p>
-          <a:p>
-            <a:pPr>
+              <a:t> Zoom web portal → your meeting → Polls. Question: “You still love nursing. You also dread the next shift. Does that describe you?” Answers: Yes, most days / Some days / Not yet, but I'm curious.</a:t>
+            </a:r>
+          </a:p>
+          <a:p>
+            <a:pPr marL="274638" indent="-274638">
+              <a:lnSpc>
+                <a:spcPct val="108000"/>
+              </a:lnSpc>
               <a:spcAft>
-                <a:spcPts val="1000"/>
+                <a:spcPts val="1100"/>
               </a:spcAft>
+              <a:buClr>
+                <a:srgbClr val="1B3A5B"/>
+              </a:buClr>
+              <a:buFont typeface="Arial"/>
+              <a:buChar char="•"/>
             </a:pPr>
             <a:r>
               <a:rPr sz="1600" b="1" i="0">
@@ -5092,7 +5108,7 @@
                 </a:solidFill>
                 <a:latin typeface="Arial"/>
               </a:rPr>
-              <a:t>•  (Optional) Poll 2:</a:t>
+              <a:t>(Optional) Poll 2:</a:t>
             </a:r>
             <a:r>
               <a:rPr sz="1600" b="0" i="0">
@@ -5105,10 +5121,18 @@
             </a:r>
           </a:p>
           <a:p>
-            <a:pPr>
+            <a:pPr marL="274638" indent="-274638">
+              <a:lnSpc>
+                <a:spcPct val="108000"/>
+              </a:lnSpc>
               <a:spcAft>
-                <a:spcPts val="1000"/>
+                <a:spcPts val="1100"/>
               </a:spcAft>
+              <a:buClr>
+                <a:srgbClr val="1B3A5B"/>
+              </a:buClr>
+              <a:buFont typeface="Arial"/>
+              <a:buChar char="•"/>
             </a:pPr>
             <a:r>
               <a:rPr sz="1600" b="1" i="0">
@@ -5117,7 +5141,7 @@
                 </a:solidFill>
                 <a:latin typeface="Arial"/>
               </a:rPr>
-              <a:t>•  Enable breakout rooms:</a:t>
+              <a:t>Enable breakout rooms:</a:t>
             </a:r>
             <a:r>
               <a:rPr sz="1600" b="0" i="0">
@@ -5130,10 +5154,18 @@
             </a:r>
           </a:p>
           <a:p>
-            <a:pPr>
+            <a:pPr marL="274638" indent="-274638">
+              <a:lnSpc>
+                <a:spcPct val="108000"/>
+              </a:lnSpc>
               <a:spcAft>
-                <a:spcPts val="1000"/>
+                <a:spcPts val="1100"/>
               </a:spcAft>
+              <a:buClr>
+                <a:srgbClr val="1B3A5B"/>
+              </a:buClr>
+              <a:buFont typeface="Arial"/>
+              <a:buChar char="•"/>
             </a:pPr>
             <a:r>
               <a:rPr sz="1600" b="1" i="0">
@@ -5142,7 +5174,7 @@
                 </a:solidFill>
                 <a:latin typeface="Arial"/>
               </a:rPr>
-              <a:t>•  Assign a co-host:</a:t>
+              <a:t>Assign a co-host:</a:t>
             </a:r>
             <a:r>
               <a:rPr sz="1600" b="0" i="0">
@@ -5155,10 +5187,18 @@
             </a:r>
           </a:p>
           <a:p>
-            <a:pPr>
+            <a:pPr marL="274638" indent="-274638">
+              <a:lnSpc>
+                <a:spcPct val="108000"/>
+              </a:lnSpc>
               <a:spcAft>
-                <a:spcPts val="1000"/>
+                <a:spcPts val="1100"/>
               </a:spcAft>
+              <a:buClr>
+                <a:srgbClr val="1B3A5B"/>
+              </a:buClr>
+              <a:buFont typeface="Arial"/>
+              <a:buChar char="•"/>
             </a:pPr>
             <a:r>
               <a:rPr sz="1600" b="1" i="0">
@@ -5167,7 +5207,7 @@
                 </a:solidFill>
                 <a:latin typeface="Arial"/>
               </a:rPr>
-              <a:t>•  Turn ON:</a:t>
+              <a:t>Turn ON:</a:t>
             </a:r>
             <a:r>
               <a:rPr sz="1600" b="0" i="0">
@@ -5180,10 +5220,18 @@
             </a:r>
           </a:p>
           <a:p>
-            <a:pPr>
+            <a:pPr marL="274638" indent="-274638">
+              <a:lnSpc>
+                <a:spcPct val="108000"/>
+              </a:lnSpc>
               <a:spcAft>
-                <a:spcPts val="1000"/>
+                <a:spcPts val="1100"/>
               </a:spcAft>
+              <a:buClr>
+                <a:srgbClr val="1B3A5B"/>
+              </a:buClr>
+              <a:buFont typeface="Arial"/>
+              <a:buChar char="•"/>
             </a:pPr>
             <a:r>
               <a:rPr sz="1600" b="1" i="0">
@@ -5192,7 +5240,7 @@
                 </a:solidFill>
                 <a:latin typeface="Arial"/>
               </a:rPr>
-              <a:t>•  Have ready to paste in chat:</a:t>
+              <a:t>Have ready to paste in chat:</a:t>
             </a:r>
             <a:r>
               <a:rPr sz="1600" b="0" i="0">
@@ -5235,7 +5283,7 @@
                 </a:solidFill>
                 <a:latin typeface="Georgia"/>
               </a:rPr>
-              <a:t>Thrive 55+ · Kickoff Webinar</a:t>
+              <a:t>© 2026 Sue Adair · Thrive 55+ Nursing Advantage™</a:t>
             </a:r>
           </a:p>
         </p:txBody>
@@ -5447,10 +5495,18 @@
           </a:bodyPr>
           <a:lstStyle/>
           <a:p>
-            <a:pPr>
+            <a:pPr marL="274638" indent="-274638">
+              <a:lnSpc>
+                <a:spcPct val="108000"/>
+              </a:lnSpc>
               <a:spcAft>
-                <a:spcPts val="900"/>
+                <a:spcPts val="1100"/>
               </a:spcAft>
+              <a:buClr>
+                <a:srgbClr val="1B3A5B"/>
+              </a:buClr>
+              <a:buFont typeface="Arial"/>
+              <a:buChar char="•"/>
             </a:pPr>
             <a:r>
               <a:rPr sz="1650" b="1" i="0">
@@ -5459,7 +5515,7 @@
                 </a:solidFill>
                 <a:latin typeface="Arial"/>
               </a:rPr>
-              <a:t>•  Name what's wearing you down</a:t>
+              <a:t>Name what's wearing you down</a:t>
             </a:r>
             <a:r>
               <a:rPr sz="1650" b="0" i="0">
@@ -5468,14 +5524,22 @@
                 </a:solidFill>
                 <a:latin typeface="Arial"/>
               </a:rPr>
-              <a:t> — your three loads, scored, in writing</a:t>
-            </a:r>
-          </a:p>
-          <a:p>
-            <a:pPr>
+              <a:t>: your three loads, scored, in writing</a:t>
+            </a:r>
+          </a:p>
+          <a:p>
+            <a:pPr marL="274638" indent="-274638">
+              <a:lnSpc>
+                <a:spcPct val="108000"/>
+              </a:lnSpc>
               <a:spcAft>
-                <a:spcPts val="900"/>
+                <a:spcPts val="1100"/>
               </a:spcAft>
+              <a:buClr>
+                <a:srgbClr val="1B3A5B"/>
+              </a:buClr>
+              <a:buFont typeface="Arial"/>
+              <a:buChar char="•"/>
             </a:pPr>
             <a:r>
               <a:rPr sz="1650" b="1" i="0">
@@ -5484,7 +5548,7 @@
                 </a:solidFill>
                 <a:latin typeface="Arial"/>
               </a:rPr>
-              <a:t>•  Describe five strengths</a:t>
+              <a:t>Describe five strengths</a:t>
             </a:r>
             <a:r>
               <a:rPr sz="1650" b="0" i="0">
@@ -5493,14 +5557,22 @@
                 </a:solidFill>
                 <a:latin typeface="Arial"/>
               </a:rPr>
-              <a:t> you'd bring to a next role — without shame</a:t>
-            </a:r>
-          </a:p>
-          <a:p>
-            <a:pPr>
+              <a:t> you'd bring to a next role, without shame</a:t>
+            </a:r>
+          </a:p>
+          <a:p>
+            <a:pPr marL="274638" indent="-274638">
+              <a:lnSpc>
+                <a:spcPct val="108000"/>
+              </a:lnSpc>
               <a:spcAft>
-                <a:spcPts val="900"/>
+                <a:spcPts val="1100"/>
               </a:spcAft>
+              <a:buClr>
+                <a:srgbClr val="1B3A5B"/>
+              </a:buClr>
+              <a:buFont typeface="Arial"/>
+              <a:buChar char="•"/>
             </a:pPr>
             <a:r>
               <a:rPr sz="1650" b="1" i="0">
@@ -5509,7 +5581,7 @@
                 </a:solidFill>
                 <a:latin typeface="Arial"/>
               </a:rPr>
-              <a:t>•  Investigate a role before applying</a:t>
+              <a:t>Investigate a role before applying</a:t>
             </a:r>
             <a:r>
               <a:rPr sz="1650" b="0" i="0">
@@ -5518,14 +5590,22 @@
                 </a:solidFill>
                 <a:latin typeface="Arial"/>
               </a:rPr>
-              <a:t> — five postings, three conversations, one comparison</a:t>
-            </a:r>
-          </a:p>
-          <a:p>
-            <a:pPr>
+              <a:t>: five postings, three conversations, one comparison</a:t>
+            </a:r>
+          </a:p>
+          <a:p>
+            <a:pPr marL="274638" indent="-274638">
+              <a:lnSpc>
+                <a:spcPct val="108000"/>
+              </a:lnSpc>
               <a:spcAft>
-                <a:spcPts val="900"/>
+                <a:spcPts val="1100"/>
               </a:spcAft>
+              <a:buClr>
+                <a:srgbClr val="1B3A5B"/>
+              </a:buClr>
+              <a:buFont typeface="Arial"/>
+              <a:buChar char="•"/>
             </a:pPr>
             <a:r>
               <a:rPr sz="1650" b="1" i="0">
@@ -5534,7 +5614,7 @@
                 </a:solidFill>
                 <a:latin typeface="Arial"/>
               </a:rPr>
-              <a:t>•  Know your money questions</a:t>
+              <a:t>Know your money questions</a:t>
             </a:r>
             <a:r>
               <a:rPr sz="1650" b="0" i="0">
@@ -5543,14 +5623,22 @@
                 </a:solidFill>
                 <a:latin typeface="Arial"/>
               </a:rPr>
-              <a:t> — the income, benefit, and timing facts to gather</a:t>
-            </a:r>
-          </a:p>
-          <a:p>
-            <a:pPr>
+              <a:t>: the income, benefit, and timing facts to gather</a:t>
+            </a:r>
+          </a:p>
+          <a:p>
+            <a:pPr marL="274638" indent="-274638">
+              <a:lnSpc>
+                <a:spcPct val="108000"/>
+              </a:lnSpc>
               <a:spcAft>
-                <a:spcPts val="900"/>
+                <a:spcPts val="1100"/>
               </a:spcAft>
+              <a:buClr>
+                <a:srgbClr val="1B3A5B"/>
+              </a:buClr>
+              <a:buFont typeface="Arial"/>
+              <a:buChar char="•"/>
             </a:pPr>
             <a:r>
               <a:rPr sz="1650" b="1" i="0">
@@ -5559,7 +5647,7 @@
                 </a:solidFill>
                 <a:latin typeface="Arial"/>
               </a:rPr>
-              <a:t>•  Commit to one informed step</a:t>
+              <a:t>Commit to one informed step</a:t>
             </a:r>
             <a:r>
               <a:rPr sz="1650" b="0" i="0">
@@ -5568,7 +5656,7 @@
                 </a:solidFill>
                 <a:latin typeface="Arial"/>
               </a:rPr>
-              <a:t> — specific, chosen by you, with a date</a:t>
+              <a:t>: specific, chosen by you, with a date</a:t>
             </a:r>
           </a:p>
         </p:txBody>
@@ -5660,7 +5748,7 @@
                 </a:solidFill>
                 <a:latin typeface="Georgia"/>
               </a:rPr>
-              <a:t>Thrive 55+ · Kickoff Webinar</a:t>
+              <a:t>© 2026 Sue Adair · Thrive 55+ Nursing Advantage™</a:t>
             </a:r>
           </a:p>
         </p:txBody>
@@ -5920,7 +6008,7 @@
                 </a:solidFill>
                 <a:latin typeface="Arial"/>
               </a:rPr>
-              <a:t>   Tonight — meet the cohort, see the whole map, set an intention</a:t>
+              <a:t>   Tonight: meet the cohort, see the whole map, set an intention</a:t>
             </a:r>
           </a:p>
         </p:txBody>
@@ -6070,7 +6158,7 @@
                 </a:solidFill>
                 <a:latin typeface="Arial"/>
               </a:rPr>
-              <a:t>   A live strengths workshop — naming what you bring</a:t>
+              <a:t>   A live strengths workshop: naming what you bring</a:t>
             </a:r>
           </a:p>
         </p:txBody>
@@ -6220,7 +6308,7 @@
                 </a:solidFill>
                 <a:latin typeface="Arial"/>
               </a:rPr>
-              <a:t>   A live session with Alyson — career and money belong together</a:t>
+              <a:t>   A live session with Alyson: career and money belong together</a:t>
             </a:r>
           </a:p>
         </p:txBody>
@@ -6329,7 +6417,7 @@
                 </a:solidFill>
                 <a:latin typeface="Georgia"/>
               </a:rPr>
-              <a:t>Thrive 55+ · Kickoff Webinar</a:t>
+              <a:t>© 2026 Sue Adair · Thrive 55+ Nursing Advantage™</a:t>
             </a:r>
           </a:p>
         </p:txBody>
@@ -6567,7 +6655,7 @@
             <a:r>
               <a:rPr sz="1200" b="1" i="0">
                 <a:solidFill>
-                  <a:srgbClr val="A84A2E"/>
+                  <a:srgbClr val="1B3A5B"/>
                 </a:solidFill>
                 <a:latin typeface="Arial"/>
               </a:rPr>
@@ -6577,13 +6665,13 @@
           <a:p>
             <a:pPr>
               <a:spcBef>
-                <a:spcPts val="400"/>
+                <a:spcPts val="700"/>
               </a:spcBef>
             </a:pPr>
             <a:r>
               <a:rPr sz="1750" b="1" i="0">
                 <a:solidFill>
-                  <a:srgbClr val="1B3A5B"/>
+                  <a:srgbClr val="187878"/>
                 </a:solidFill>
                 <a:latin typeface="Georgia"/>
               </a:rPr>
@@ -6593,17 +6681,17 @@
           <a:p>
             <a:pPr>
               <a:spcBef>
-                <a:spcPts val="600"/>
+                <a:spcPts val="1000"/>
               </a:spcBef>
             </a:pPr>
             <a:r>
-              <a:rPr sz="1350" b="0" i="0">
+              <a:rPr sz="1400" b="0" i="0">
                 <a:solidFill>
                   <a:srgbClr val="57635F"/>
                 </a:solidFill>
                 <a:latin typeface="Arial"/>
               </a:rPr>
-              <a:t>The week starts here, together — teaching, discussion, and each other.</a:t>
+              <a:t>The week starts here, together: teaching, discussion, and each other.</a:t>
             </a:r>
           </a:p>
         </p:txBody>
@@ -6656,7 +6744,7 @@
             <a:r>
               <a:rPr sz="1200" b="1" i="0">
                 <a:solidFill>
-                  <a:srgbClr val="187878"/>
+                  <a:srgbClr val="1B3A5B"/>
                 </a:solidFill>
                 <a:latin typeface="Arial"/>
               </a:rPr>
@@ -6666,13 +6754,13 @@
           <a:p>
             <a:pPr>
               <a:spcBef>
-                <a:spcPts val="400"/>
+                <a:spcPts val="700"/>
               </a:spcBef>
             </a:pPr>
             <a:r>
               <a:rPr sz="1750" b="1" i="0">
                 <a:solidFill>
-                  <a:srgbClr val="1B3A5B"/>
+                  <a:srgbClr val="187878"/>
                 </a:solidFill>
                 <a:latin typeface="Georgia"/>
               </a:rPr>
@@ -6682,11 +6770,11 @@
           <a:p>
             <a:pPr>
               <a:spcBef>
-                <a:spcPts val="600"/>
+                <a:spcPts val="1000"/>
               </a:spcBef>
             </a:pPr>
             <a:r>
-              <a:rPr sz="1350" b="0" i="0">
+              <a:rPr sz="1400" b="0" i="0">
                 <a:solidFill>
                   <a:srgbClr val="57635F"/>
                 </a:solidFill>
@@ -6745,7 +6833,7 @@
             <a:r>
               <a:rPr sz="1200" b="1" i="0">
                 <a:solidFill>
-                  <a:srgbClr val="187878"/>
+                  <a:srgbClr val="1B3A5B"/>
                 </a:solidFill>
                 <a:latin typeface="Arial"/>
               </a:rPr>
@@ -6755,13 +6843,13 @@
           <a:p>
             <a:pPr>
               <a:spcBef>
-                <a:spcPts val="400"/>
+                <a:spcPts val="700"/>
               </a:spcBef>
             </a:pPr>
             <a:r>
               <a:rPr sz="1750" b="1" i="0">
                 <a:solidFill>
-                  <a:srgbClr val="1B3A5B"/>
+                  <a:srgbClr val="187878"/>
                 </a:solidFill>
                 <a:latin typeface="Georgia"/>
               </a:rPr>
@@ -6771,11 +6859,11 @@
           <a:p>
             <a:pPr>
               <a:spcBef>
-                <a:spcPts val="600"/>
+                <a:spcPts val="1000"/>
               </a:spcBef>
             </a:pPr>
             <a:r>
-              <a:rPr sz="1350" b="0" i="0">
+              <a:rPr sz="1400" b="0" i="0">
                 <a:solidFill>
                   <a:srgbClr val="57635F"/>
                 </a:solidFill>
@@ -6834,7 +6922,7 @@
             <a:r>
               <a:rPr sz="1200" b="1" i="0">
                 <a:solidFill>
-                  <a:srgbClr val="187878"/>
+                  <a:srgbClr val="1B3A5B"/>
                 </a:solidFill>
                 <a:latin typeface="Arial"/>
               </a:rPr>
@@ -6844,13 +6932,13 @@
           <a:p>
             <a:pPr>
               <a:spcBef>
-                <a:spcPts val="400"/>
+                <a:spcPts val="700"/>
               </a:spcBef>
             </a:pPr>
             <a:r>
               <a:rPr sz="1750" b="1" i="0">
                 <a:solidFill>
-                  <a:srgbClr val="1B3A5B"/>
+                  <a:srgbClr val="187878"/>
                 </a:solidFill>
                 <a:latin typeface="Georgia"/>
               </a:rPr>
@@ -6860,11 +6948,11 @@
           <a:p>
             <a:pPr>
               <a:spcBef>
-                <a:spcPts val="600"/>
+                <a:spcPts val="1000"/>
               </a:spcBef>
             </a:pPr>
             <a:r>
-              <a:rPr sz="1350" b="0" i="0">
+              <a:rPr sz="1400" b="0" i="0">
                 <a:solidFill>
                   <a:srgbClr val="57635F"/>
                 </a:solidFill>
@@ -6904,7 +6992,7 @@
                 </a:solidFill>
                 <a:latin typeface="Arial"/>
               </a:rPr>
-              <a:t>Lessons unlock after each webinar — the cohort moves together, and nobody is behind.</a:t>
+              <a:t>Lessons unlock after each webinar, so the cohort moves together, and nobody is behind.</a:t>
             </a:r>
           </a:p>
         </p:txBody>
@@ -6938,7 +7026,7 @@
                 </a:solidFill>
                 <a:latin typeface="Georgia"/>
               </a:rPr>
-              <a:t>Thrive 55+ · Kickoff Webinar</a:t>
+              <a:t>© 2026 Sue Adair · Thrive 55+ Nursing Advantage™</a:t>
             </a:r>
           </a:p>
         </p:txBody>
@@ -7150,10 +7238,18 @@
           </a:bodyPr>
           <a:lstStyle/>
           <a:p>
-            <a:pPr>
+            <a:pPr marL="274638" indent="-274638">
+              <a:lnSpc>
+                <a:spcPct val="108000"/>
+              </a:lnSpc>
               <a:spcAft>
-                <a:spcPts val="700"/>
+                <a:spcPts val="1100"/>
               </a:spcAft>
+              <a:buClr>
+                <a:srgbClr val="1B3A5B"/>
+              </a:buClr>
+              <a:buFont typeface="Arial"/>
+              <a:buChar char="•"/>
             </a:pPr>
             <a:r>
               <a:rPr sz="1550" b="1" i="0">
@@ -7162,7 +7258,7 @@
                 </a:solidFill>
                 <a:latin typeface="Arial"/>
               </a:rPr>
-              <a:t>•  Lessons</a:t>
+              <a:t>Lessons</a:t>
             </a:r>
             <a:r>
               <a:rPr sz="1550" b="0" i="0">
@@ -7171,14 +7267,22 @@
                 </a:solidFill>
                 <a:latin typeface="Arial"/>
               </a:rPr>
-              <a:t> — the week's short videos, with pause-and-do workbook moments</a:t>
-            </a:r>
-          </a:p>
-          <a:p>
-            <a:pPr>
+              <a:t>: the week's short videos, with pause-and-do workbook moments</a:t>
+            </a:r>
+          </a:p>
+          <a:p>
+            <a:pPr marL="274638" indent="-274638">
+              <a:lnSpc>
+                <a:spcPct val="108000"/>
+              </a:lnSpc>
               <a:spcAft>
-                <a:spcPts val="700"/>
+                <a:spcPts val="1100"/>
               </a:spcAft>
+              <a:buClr>
+                <a:srgbClr val="1B3A5B"/>
+              </a:buClr>
+              <a:buFont typeface="Arial"/>
+              <a:buChar char="•"/>
             </a:pPr>
             <a:r>
               <a:rPr sz="1550" b="1" i="0">
@@ -7187,7 +7291,7 @@
                 </a:solidFill>
                 <a:latin typeface="Arial"/>
               </a:rPr>
-              <a:t>•  My Workbook</a:t>
+              <a:t>My Workbook</a:t>
             </a:r>
             <a:r>
               <a:rPr sz="1550" b="0" i="0">
@@ -7196,14 +7300,22 @@
                 </a:solidFill>
                 <a:latin typeface="Arial"/>
               </a:rPr>
-              <a:t> — saves automatically in your browser, plus a printable PDF edition to download and keep</a:t>
-            </a:r>
-          </a:p>
-          <a:p>
-            <a:pPr>
+              <a:t>: saves automatically in your browser, plus a printable PDF edition to download and keep</a:t>
+            </a:r>
+          </a:p>
+          <a:p>
+            <a:pPr marL="274638" indent="-274638">
+              <a:lnSpc>
+                <a:spcPct val="108000"/>
+              </a:lnSpc>
               <a:spcAft>
-                <a:spcPts val="700"/>
+                <a:spcPts val="1100"/>
               </a:spcAft>
+              <a:buClr>
+                <a:srgbClr val="1B3A5B"/>
+              </a:buClr>
+              <a:buFont typeface="Arial"/>
+              <a:buChar char="•"/>
             </a:pPr>
             <a:r>
               <a:rPr sz="1550" b="1" i="0">
@@ -7212,7 +7324,7 @@
                 </a:solidFill>
                 <a:latin typeface="Arial"/>
               </a:rPr>
-              <a:t>•  Roles Explorer</a:t>
+              <a:t>Roles Explorer</a:t>
             </a:r>
             <a:r>
               <a:rPr sz="1550" b="0" i="0">
@@ -7221,14 +7333,22 @@
                 </a:solidFill>
                 <a:latin typeface="Arial"/>
               </a:rPr>
-              <a:t> — role categories, search titles, red flags &amp; tradeoffs</a:t>
-            </a:r>
-          </a:p>
-          <a:p>
-            <a:pPr>
+              <a:t>: role categories, search titles, red flags &amp; tradeoffs</a:t>
+            </a:r>
+          </a:p>
+          <a:p>
+            <a:pPr marL="274638" indent="-274638">
+              <a:lnSpc>
+                <a:spcPct val="108000"/>
+              </a:lnSpc>
               <a:spcAft>
-                <a:spcPts val="700"/>
+                <a:spcPts val="1100"/>
               </a:spcAft>
+              <a:buClr>
+                <a:srgbClr val="1B3A5B"/>
+              </a:buClr>
+              <a:buFont typeface="Arial"/>
+              <a:buChar char="•"/>
             </a:pPr>
             <a:r>
               <a:rPr sz="1550" b="1" i="0">
@@ -7237,7 +7357,7 @@
                 </a:solidFill>
                 <a:latin typeface="Arial"/>
               </a:rPr>
-              <a:t>•  Resources</a:t>
+              <a:t>Resources</a:t>
             </a:r>
             <a:r>
               <a:rPr sz="1550" b="0" i="0">
@@ -7246,14 +7366,22 @@
                 </a:solidFill>
                 <a:latin typeface="Arial"/>
               </a:rPr>
-              <a:t> — job research, interview prep, and tech-confidence links</a:t>
-            </a:r>
-          </a:p>
-          <a:p>
-            <a:pPr>
+              <a:t>: job research, interview prep, and tech-confidence links</a:t>
+            </a:r>
+          </a:p>
+          <a:p>
+            <a:pPr marL="274638" indent="-274638">
+              <a:lnSpc>
+                <a:spcPct val="108000"/>
+              </a:lnSpc>
               <a:spcAft>
-                <a:spcPts val="700"/>
+                <a:spcPts val="1100"/>
               </a:spcAft>
+              <a:buClr>
+                <a:srgbClr val="1B3A5B"/>
+              </a:buClr>
+              <a:buFont typeface="Arial"/>
+              <a:buChar char="•"/>
             </a:pPr>
             <a:r>
               <a:rPr sz="1550" b="1" i="0">
@@ -7262,7 +7390,7 @@
                 </a:solidFill>
                 <a:latin typeface="Arial"/>
               </a:rPr>
-              <a:t>•  Hope, your coach</a:t>
+              <a:t>Hope, your coach</a:t>
             </a:r>
             <a:r>
               <a:rPr sz="1550" b="0" i="0">
@@ -7271,7 +7399,7 @@
                 </a:solidFill>
                 <a:latin typeface="Arial"/>
               </a:rPr>
-              <a:t> — talk anything through, any hour, judgment-free</a:t>
+              <a:t>: talk anything through, any hour, judgment-free</a:t>
             </a:r>
           </a:p>
         </p:txBody>
@@ -7284,7 +7412,7 @@
         </p:nvSpPr>
         <p:spPr>
           <a:xfrm>
-            <a:off x="502920" y="4709160"/>
+            <a:off x="502920" y="4983480"/>
             <a:ext cx="6766560" cy="1234440"/>
           </a:xfrm>
           <a:prstGeom prst="roundRect">
@@ -7339,7 +7467,7 @@
                 </a:solidFill>
                 <a:latin typeface="Arial"/>
               </a:rPr>
-              <a:t>Take the two-minute starting-point survey, then click “I attended this webinar” — Week 0, your toolkit, and the workbook PDF open with it.</a:t>
+              <a:t>Take the two-minute starting-point survey, then click “I attended this webinar”: Week 0, your toolkit, and the workbook PDF open with it.</a:t>
             </a:r>
           </a:p>
         </p:txBody>
@@ -7397,7 +7525,7 @@
                 </a:solidFill>
                 <a:latin typeface="Georgia"/>
               </a:rPr>
-              <a:t>Thrive 55+ · Kickoff Webinar</a:t>
+              <a:t>© 2026 Sue Adair · Thrive 55+ Nursing Advantage™</a:t>
             </a:r>
           </a:p>
         </p:txBody>
@@ -7699,6 +7827,7 @@
         </p:nvPicPr>
         <p:blipFill>
           <a:blip r:embed="rId2"/>
+          <a:srcRect l="7000" r="3000" b="10000"/>
           <a:stretch>
             <a:fillRect/>
           </a:stretch>
@@ -7742,7 +7871,7 @@
                 </a:solidFill>
                 <a:latin typeface="Georgia"/>
               </a:rPr>
-              <a:t>Thrive 55+ · Kickoff Webinar</a:t>
+              <a:t>© 2026 Sue Adair · Thrive 55+ Nursing Advantage™</a:t>
             </a:r>
           </a:p>
         </p:txBody>
@@ -7927,7 +8056,7 @@
                 </a:solidFill>
                 <a:latin typeface="Georgia"/>
               </a:rPr>
-              <a:t>Before Week 1 — about 15 minutes</a:t>
+              <a:t>Before Week 1: about 15 minutes</a:t>
             </a:r>
           </a:p>
         </p:txBody>
@@ -8091,7 +8220,7 @@
                 </a:solidFill>
                 <a:latin typeface="Arial"/>
               </a:rPr>
-              <a:t>Mark tonight's webinar attended — everything opens, and you can download your workbook PDF.</a:t>
+              <a:t>Mark tonight's webinar attended; everything opens, and you can download your workbook PDF.</a:t>
             </a:r>
           </a:p>
         </p:txBody>
@@ -8173,7 +8302,7 @@
                 </a:solidFill>
                 <a:latin typeface="Arial"/>
               </a:rPr>
-              <a:t>“You're Not Done: Start Here” — five minutes.</a:t>
+              <a:t>“You're Not Done: Start Here,” five minutes.</a:t>
             </a:r>
           </a:p>
         </p:txBody>
@@ -8357,7 +8486,7 @@
                 </a:solidFill>
                 <a:latin typeface="Georgia"/>
               </a:rPr>
-              <a:t>Thrive 55+ · Kickoff Webinar</a:t>
+              <a:t>© 2026 Sue Adair · Thrive 55+ Nursing Advantage™</a:t>
             </a:r>
           </a:p>
         </p:txBody>
@@ -8542,7 +8671,7 @@
                 </a:solidFill>
                 <a:latin typeface="Georgia"/>
               </a:rPr>
-              <a:t>Questions — and logistics</a:t>
+              <a:t>Questions and logistics</a:t>
             </a:r>
           </a:p>
         </p:txBody>
@@ -8569,10 +8698,18 @@
           </a:bodyPr>
           <a:lstStyle/>
           <a:p>
-            <a:pPr>
+            <a:pPr marL="274638" indent="-274638">
+              <a:lnSpc>
+                <a:spcPct val="108000"/>
+              </a:lnSpc>
               <a:spcAft>
-                <a:spcPts val="900"/>
+                <a:spcPts val="1100"/>
               </a:spcAft>
+              <a:buClr>
+                <a:srgbClr val="1B3A5B"/>
+              </a:buClr>
+              <a:buFont typeface="Arial"/>
+              <a:buChar char="•"/>
             </a:pPr>
             <a:r>
               <a:rPr sz="1600" b="1" i="0">
@@ -8581,7 +8718,7 @@
                 </a:solidFill>
                 <a:latin typeface="Arial"/>
               </a:rPr>
-              <a:t>•  What are you hoping for</a:t>
+              <a:t>What are you hoping for</a:t>
             </a:r>
             <a:r>
               <a:rPr sz="1600" b="0" i="0">
@@ -8594,10 +8731,18 @@
             </a:r>
           </a:p>
           <a:p>
-            <a:pPr>
+            <a:pPr marL="274638" indent="-274638">
+              <a:lnSpc>
+                <a:spcPct val="108000"/>
+              </a:lnSpc>
               <a:spcAft>
-                <a:spcPts val="900"/>
+                <a:spcPts val="1100"/>
               </a:spcAft>
+              <a:buClr>
+                <a:srgbClr val="1B3A5B"/>
+              </a:buClr>
+              <a:buFont typeface="Arial"/>
+              <a:buChar char="•"/>
             </a:pPr>
             <a:r>
               <a:rPr sz="1600" b="1" i="0">
@@ -8606,7 +8751,7 @@
                 </a:solidFill>
                 <a:latin typeface="Arial"/>
               </a:rPr>
-              <a:t>•  What are you worried about?</a:t>
+              <a:t>What are you worried about?</a:t>
             </a:r>
             <a:r>
               <a:rPr sz="1600" b="0" i="0">
@@ -8619,10 +8764,18 @@
             </a:r>
           </a:p>
           <a:p>
-            <a:pPr>
+            <a:pPr marL="274638" indent="-274638">
+              <a:lnSpc>
+                <a:spcPct val="108000"/>
+              </a:lnSpc>
               <a:spcAft>
-                <a:spcPts val="900"/>
+                <a:spcPts val="1100"/>
               </a:spcAft>
+              <a:buClr>
+                <a:srgbClr val="1B3A5B"/>
+              </a:buClr>
+              <a:buFont typeface="Arial"/>
+              <a:buChar char="•"/>
             </a:pPr>
             <a:r>
               <a:rPr sz="1600" b="1" i="0">
@@ -8631,7 +8784,7 @@
                 </a:solidFill>
                 <a:latin typeface="Arial"/>
               </a:rPr>
-              <a:t>•  Money questions?</a:t>
+              <a:t>Money questions?</a:t>
             </a:r>
             <a:r>
               <a:rPr sz="1600" b="0" i="0">
@@ -8640,7 +8793,7 @@
                 </a:solidFill>
                 <a:latin typeface="Arial"/>
               </a:rPr>
-              <a:t> We'll write them down — they're exactly what Week 5 with Alyson is for.</a:t>
+              <a:t> We'll write them down; they're exactly what Week 5 with Alyson is for.</a:t>
             </a:r>
           </a:p>
         </p:txBody>
@@ -8667,10 +8820,18 @@
           </a:bodyPr>
           <a:lstStyle/>
           <a:p>
-            <a:pPr>
+            <a:pPr marL="274638" indent="-274638">
+              <a:lnSpc>
+                <a:spcPct val="108000"/>
+              </a:lnSpc>
               <a:spcAft>
-                <a:spcPts val="900"/>
+                <a:spcPts val="1100"/>
               </a:spcAft>
+              <a:buClr>
+                <a:srgbClr val="1B3A5B"/>
+              </a:buClr>
+              <a:buFont typeface="Arial"/>
+              <a:buChar char="•"/>
             </a:pPr>
             <a:r>
               <a:rPr sz="1600" b="1" i="0">
@@ -8679,7 +8840,7 @@
                 </a:solidFill>
                 <a:latin typeface="Arial"/>
               </a:rPr>
-              <a:t>•  Same day and time each week</a:t>
+              <a:t>Same day and time each week</a:t>
             </a:r>
             <a:r>
               <a:rPr sz="1600" b="0" i="0">
@@ -8688,14 +8849,22 @@
                 </a:solidFill>
                 <a:latin typeface="Arial"/>
               </a:rPr>
-              <a:t> — the Zoom link comes by email</a:t>
-            </a:r>
-          </a:p>
-          <a:p>
-            <a:pPr>
+              <a:t>: the Zoom link comes by email</a:t>
+            </a:r>
+          </a:p>
+          <a:p>
+            <a:pPr marL="274638" indent="-274638">
+              <a:lnSpc>
+                <a:spcPct val="108000"/>
+              </a:lnSpc>
               <a:spcAft>
-                <a:spcPts val="900"/>
+                <a:spcPts val="1100"/>
               </a:spcAft>
+              <a:buClr>
+                <a:srgbClr val="1B3A5B"/>
+              </a:buClr>
+              <a:buFont typeface="Arial"/>
+              <a:buChar char="•"/>
             </a:pPr>
             <a:r>
               <a:rPr sz="1600" b="1" i="0">
@@ -8704,7 +8873,7 @@
                 </a:solidFill>
                 <a:latin typeface="Arial"/>
               </a:rPr>
-              <a:t>•  Can't make one live?</a:t>
+              <a:t>Can't make one live?</a:t>
             </a:r>
             <a:r>
               <a:rPr sz="1600" b="0" i="0">
@@ -8717,10 +8886,18 @@
             </a:r>
           </a:p>
           <a:p>
-            <a:pPr>
+            <a:pPr marL="274638" indent="-274638">
+              <a:lnSpc>
+                <a:spcPct val="108000"/>
+              </a:lnSpc>
               <a:spcAft>
-                <a:spcPts val="900"/>
+                <a:spcPts val="1100"/>
               </a:spcAft>
+              <a:buClr>
+                <a:srgbClr val="1B3A5B"/>
+              </a:buClr>
+              <a:buFont typeface="Arial"/>
+              <a:buChar char="•"/>
             </a:pPr>
             <a:r>
               <a:rPr sz="1600" b="1" i="0">
@@ -8729,7 +8906,7 @@
                 </a:solidFill>
                 <a:latin typeface="Arial"/>
               </a:rPr>
-              <a:t>•  Stuck between webinars?</a:t>
+              <a:t>Stuck between webinars?</a:t>
             </a:r>
             <a:r>
               <a:rPr sz="1600" b="0" i="0">
@@ -8772,7 +8949,7 @@
                 </a:solidFill>
                 <a:latin typeface="Georgia"/>
               </a:rPr>
-              <a:t>Thrive 55+ · Kickoff Webinar</a:t>
+              <a:t>© 2026 Sue Adair · Thrive 55+ Nursing Advantage™</a:t>
             </a:r>
           </a:p>
         </p:txBody>
@@ -9025,7 +9202,7 @@
                 </a:solidFill>
                 <a:latin typeface="Arial"/>
               </a:rPr>
-              <a:t>Next week — Name the Strain: live teaching, and scoring your three loads together.</a:t>
+              <a:t>Next week, Name the Strain: live teaching, and scoring your three loads together.</a:t>
             </a:r>
           </a:p>
         </p:txBody>
@@ -9053,24 +9230,24 @@
           <a:lstStyle/>
           <a:p>
             <a:r>
-              <a:rPr sz="1400" b="0" i="1">
+              <a:rPr sz="1600" b="1" i="0">
                 <a:solidFill>
                   <a:srgbClr val="8FD4C2"/>
                 </a:solidFill>
                 <a:latin typeface="Arial"/>
               </a:rPr>
-              <a:t>Name the strain. Capture your value. Investigate your options.</a:t>
-            </a:r>
-          </a:p>
-          <a:p>
-            <a:r>
-              <a:rPr sz="1200" b="0" i="0">
-                <a:solidFill>
-                  <a:srgbClr val="B9C8C3"/>
-                </a:solidFill>
-                <a:latin typeface="Arial"/>
-              </a:rPr>
-              <a:t>© 2026 Sue Adair | Thrive 55+ Nursing Advantage</a:t>
+              <a:t>The Thrive 55+ Career Direction Method™</a:t>
+            </a:r>
+          </a:p>
+          <a:p>
+            <a:r>
+              <a:rPr sz="1400">
+                <a:solidFill>
+                  <a:srgbClr val="EAF1EE"/>
+                </a:solidFill>
+                <a:latin typeface="Arial"/>
+              </a:rPr>
+              <a:t>Name the Strain   ·   Capture Your Value   ·   Investigate Your Options</a:t>
             </a:r>
           </a:p>
         </p:txBody>
@@ -9104,7 +9281,7 @@
                 </a:solidFill>
                 <a:latin typeface="Georgia"/>
               </a:rPr>
-              <a:t>Thrive 55+ · Kickoff Webinar</a:t>
+              <a:t>© 2026 Sue Adair · Thrive 55+ Nursing Advantage™</a:t>
             </a:r>
           </a:p>
         </p:txBody>
@@ -9283,13 +9460,13 @@
           <a:lstStyle/>
           <a:p>
             <a:r>
-              <a:rPr sz="4400" b="1" i="0">
+              <a:rPr sz="3200" b="1" i="0">
                 <a:solidFill>
                   <a:srgbClr val="1B3A5B"/>
                 </a:solidFill>
                 <a:latin typeface="Georgia"/>
               </a:rPr>
-              <a:t>Welcome to Thrive 55+</a:t>
+              <a:t>Welcome to Thrive 55+ Nursing Advantage™</a:t>
             </a:r>
           </a:p>
         </p:txBody>
@@ -9317,13 +9494,31 @@
           <a:lstStyle/>
           <a:p>
             <a:r>
-              <a:rPr sz="1900" b="0" i="0">
+              <a:rPr sz="1900">
                 <a:solidFill>
                   <a:srgbClr val="26302F"/>
                 </a:solidFill>
                 <a:latin typeface="Arial"/>
               </a:rPr>
-              <a:t>The Career Direction Method for experienced nurses — a six-week cohort program with Sue Adair, BSN, RN &amp; Alyson.</a:t>
+              <a:t>Built on the </a:t>
+            </a:r>
+            <a:r>
+              <a:rPr sz="1900" b="1">
+                <a:solidFill>
+                  <a:srgbClr val="187878"/>
+                </a:solidFill>
+                <a:latin typeface="Arial"/>
+              </a:rPr>
+              <a:t>Thrive 55+ Career Direction Method™</a:t>
+            </a:r>
+            <a:r>
+              <a:rPr sz="1900">
+                <a:solidFill>
+                  <a:srgbClr val="26302F"/>
+                </a:solidFill>
+                <a:latin typeface="Arial"/>
+              </a:rPr>
+              <a:t>, the intellectual property behind the transformation: guiding experienced nurses through a six-week cohort with Sue Adair, BSN, RN, and Alyson.</a:t>
             </a:r>
           </a:p>
           <a:p>
@@ -9396,7 +9591,7 @@
                 </a:solidFill>
                 <a:latin typeface="Arial"/>
               </a:rPr>
-              <a:t>WHILE WE GATHER — IN THE CHAT</a:t>
+              <a:t>WHILE WE GATHER · IN THE CHAT</a:t>
             </a:r>
           </a:p>
           <a:p>
@@ -9422,6 +9617,7 @@
         </p:nvPicPr>
         <p:blipFill>
           <a:blip r:embed="rId2"/>
+          <a:srcRect l="16000" t="5000" r="2000" b="13000"/>
           <a:stretch>
             <a:fillRect/>
           </a:stretch>
@@ -9465,7 +9661,7 @@
                 </a:solidFill>
                 <a:latin typeface="Georgia"/>
               </a:rPr>
-              <a:t>Thrive 55+ · Kickoff Webinar</a:t>
+              <a:t>© 2026 Sue Adair · Thrive 55+ Nursing Advantage™</a:t>
             </a:r>
           </a:p>
         </p:txBody>
@@ -9718,7 +9914,7 @@
                 </a:solidFill>
                 <a:latin typeface="Arial"/>
               </a:rPr>
-              <a:t>Both can be true — and there's a name for what you're feeling. That's what these six weeks are for.</a:t>
+              <a:t>Both can be true, and there's a name for what you're feeling. That's what these six weeks are for.</a:t>
             </a:r>
           </a:p>
         </p:txBody>
@@ -9786,7 +9982,7 @@
                 </a:solidFill>
                 <a:latin typeface="Arial"/>
               </a:rPr>
-              <a:t>Does that sentence describe you?  Yes, most days · Some days · Not yet — but I'm curious</a:t>
+              <a:t>Does that sentence describe you?  Yes, most days · Some days · Not yet, but I'm curious</a:t>
             </a:r>
           </a:p>
         </p:txBody>
@@ -9820,7 +10016,7 @@
                 </a:solidFill>
                 <a:latin typeface="Georgia"/>
               </a:rPr>
-              <a:t>Thrive 55+ · Kickoff Webinar</a:t>
+              <a:t>© 2026 Sue Adair · Thrive 55+ Nursing Advantage™</a:t>
             </a:r>
           </a:p>
         </p:txBody>
@@ -10018,7 +10214,7 @@
         </p:nvSpPr>
         <p:spPr>
           <a:xfrm>
-            <a:off x="502920" y="2011680"/>
+            <a:off x="502920" y="2377440"/>
             <a:ext cx="3611880" cy="3246120"/>
           </a:xfrm>
           <a:prstGeom prst="roundRect">
@@ -10089,7 +10285,7 @@
                 </a:solidFill>
                 <a:latin typeface="Arial"/>
               </a:rPr>
-              <a:t>Founder of Thrive 55+ Nursing Advantage. Decades at the bedside — and the creator of the three-part method you'll learn here.</a:t>
+              <a:t>Founder of Thrive 55+ Nursing Advantage. Decades at the bedside, and the creator of the three-part method you'll learn here.</a:t>
             </a:r>
           </a:p>
         </p:txBody>
@@ -10102,7 +10298,7 @@
         </p:nvSpPr>
         <p:spPr>
           <a:xfrm>
-            <a:off x="4297680" y="2011680"/>
+            <a:off x="4297680" y="2377440"/>
             <a:ext cx="3611880" cy="3246120"/>
           </a:xfrm>
           <a:prstGeom prst="roundRect">
@@ -10186,7 +10382,7 @@
         </p:nvSpPr>
         <p:spPr>
           <a:xfrm>
-            <a:off x="8092440" y="2011680"/>
+            <a:off x="8092440" y="2377440"/>
             <a:ext cx="3611880" cy="3246120"/>
           </a:xfrm>
           <a:prstGeom prst="roundRect">
@@ -10257,7 +10453,7 @@
                 </a:solidFill>
                 <a:latin typeface="Arial"/>
               </a:rPr>
-              <a:t>An AI coach grounded in this course. She'll ask more questions than she answers — and she joins you right after tonight.</a:t>
+              <a:t>An AI coach grounded in this course. She'll ask more questions than she answers, and she joins you right after tonight.</a:t>
             </a:r>
           </a:p>
         </p:txBody>
@@ -10291,7 +10487,7 @@
                 </a:solidFill>
                 <a:latin typeface="Georgia"/>
               </a:rPr>
-              <a:t>Thrive 55+ · Kickoff Webinar</a:t>
+              <a:t>© 2026 Sue Adair · Thrive 55+ Nursing Advantage™</a:t>
             </a:r>
           </a:p>
         </p:txBody>
@@ -10503,10 +10699,18 @@
           </a:bodyPr>
           <a:lstStyle/>
           <a:p>
-            <a:pPr>
+            <a:pPr marL="274638" indent="-274638">
+              <a:lnSpc>
+                <a:spcPct val="108000"/>
+              </a:lnSpc>
               <a:spcAft>
-                <a:spcPts val="900"/>
+                <a:spcPts val="1100"/>
               </a:spcAft>
+              <a:buClr>
+                <a:srgbClr val="1B3A5B"/>
+              </a:buClr>
+              <a:buFont typeface="Arial"/>
+              <a:buChar char="•"/>
             </a:pPr>
             <a:r>
               <a:rPr sz="1650" b="1" i="0">
@@ -10515,7 +10719,7 @@
                 </a:solidFill>
                 <a:latin typeface="Arial"/>
               </a:rPr>
-              <a:t>•  Stories stay, lessons leave.</a:t>
+              <a:t>Stories stay, lessons leave.</a:t>
             </a:r>
             <a:r>
               <a:rPr sz="1650" b="0" i="0">
@@ -10528,10 +10732,18 @@
             </a:r>
           </a:p>
           <a:p>
-            <a:pPr>
+            <a:pPr marL="274638" indent="-274638">
+              <a:lnSpc>
+                <a:spcPct val="108000"/>
+              </a:lnSpc>
               <a:spcAft>
-                <a:spcPts val="900"/>
+                <a:spcPts val="1100"/>
               </a:spcAft>
+              <a:buClr>
+                <a:srgbClr val="1B3A5B"/>
+              </a:buClr>
+              <a:buFont typeface="Arial"/>
+              <a:buChar char="•"/>
             </a:pPr>
             <a:r>
               <a:rPr sz="1650" b="1" i="0">
@@ -10540,7 +10752,7 @@
                 </a:solidFill>
                 <a:latin typeface="Arial"/>
               </a:rPr>
-              <a:t>•  Every path is welcome.</a:t>
+              <a:t>Every path is welcome.</a:t>
             </a:r>
             <a:r>
               <a:rPr sz="1650" b="0" i="0">
@@ -10549,14 +10761,22 @@
                 </a:solidFill>
                 <a:latin typeface="Arial"/>
               </a:rPr>
-              <a:t> Bedside, clinic, leadership, already searching, just curious — nobody is behind.</a:t>
-            </a:r>
-          </a:p>
-          <a:p>
-            <a:pPr>
+              <a:t> Bedside, clinic, leadership, already searching, just curious. Nobody is behind.</a:t>
+            </a:r>
+          </a:p>
+          <a:p>
+            <a:pPr marL="274638" indent="-274638">
+              <a:lnSpc>
+                <a:spcPct val="108000"/>
+              </a:lnSpc>
               <a:spcAft>
-                <a:spcPts val="900"/>
+                <a:spcPts val="1100"/>
               </a:spcAft>
+              <a:buClr>
+                <a:srgbClr val="1B3A5B"/>
+              </a:buClr>
+              <a:buFont typeface="Arial"/>
+              <a:buChar char="•"/>
             </a:pPr>
             <a:r>
               <a:rPr sz="1650" b="1" i="0">
@@ -10565,7 +10785,7 @@
                 </a:solidFill>
                 <a:latin typeface="Arial"/>
               </a:rPr>
-              <a:t>•  Cameras on when you can</a:t>
+              <a:t>Cameras on when you can</a:t>
             </a:r>
             <a:r>
               <a:rPr sz="1650" b="0" i="0">
@@ -10574,14 +10794,22 @@
                 </a:solidFill>
                 <a:latin typeface="Arial"/>
               </a:rPr>
-              <a:t> — and audio-only is always okay.</a:t>
-            </a:r>
-          </a:p>
-          <a:p>
-            <a:pPr>
+              <a:t>, and audio-only is always okay.</a:t>
+            </a:r>
+          </a:p>
+          <a:p>
+            <a:pPr marL="274638" indent="-274638">
+              <a:lnSpc>
+                <a:spcPct val="108000"/>
+              </a:lnSpc>
               <a:spcAft>
-                <a:spcPts val="900"/>
+                <a:spcPts val="1100"/>
               </a:spcAft>
+              <a:buClr>
+                <a:srgbClr val="1B3A5B"/>
+              </a:buClr>
+              <a:buFont typeface="Arial"/>
+              <a:buChar char="•"/>
             </a:pPr>
             <a:r>
               <a:rPr sz="1650" b="1" i="0">
@@ -10590,7 +10818,7 @@
                 </a:solidFill>
                 <a:latin typeface="Arial"/>
               </a:rPr>
-              <a:t>•  Discussion over lecture.</a:t>
+              <a:t>Discussion over lecture.</a:t>
             </a:r>
             <a:r>
               <a:rPr sz="1650" b="0" i="0">
@@ -10603,10 +10831,18 @@
             </a:r>
           </a:p>
           <a:p>
-            <a:pPr>
+            <a:pPr marL="274638" indent="-274638">
+              <a:lnSpc>
+                <a:spcPct val="108000"/>
+              </a:lnSpc>
               <a:spcAft>
-                <a:spcPts val="900"/>
+                <a:spcPts val="1100"/>
               </a:spcAft>
+              <a:buClr>
+                <a:srgbClr val="1B3A5B"/>
+              </a:buClr>
+              <a:buFont typeface="Arial"/>
+              <a:buChar char="•"/>
             </a:pPr>
             <a:r>
               <a:rPr sz="1650" b="1" i="0">
@@ -10615,7 +10851,7 @@
                 </a:solidFill>
                 <a:latin typeface="Arial"/>
               </a:rPr>
-              <a:t>•  No one will tell you to quit — or to stay.</a:t>
+              <a:t>No one will tell you to quit, or to stay.</a:t>
             </a:r>
             <a:r>
               <a:rPr sz="1650" b="0" i="0">
@@ -10639,6 +10875,7 @@
         </p:nvPicPr>
         <p:blipFill>
           <a:blip r:embed="rId2"/>
+          <a:srcRect l="2000" t="10000" r="16000" b="8000"/>
           <a:stretch>
             <a:fillRect/>
           </a:stretch>
@@ -10682,7 +10919,7 @@
                 </a:solidFill>
                 <a:latin typeface="Georgia"/>
               </a:rPr>
-              <a:t>Thrive 55+ · Kickoff Webinar</a:t>
+              <a:t>© 2026 Sue Adair · Thrive 55+ Nursing Advantage™</a:t>
             </a:r>
           </a:p>
         </p:txBody>
@@ -10894,10 +11131,18 @@
           </a:bodyPr>
           <a:lstStyle/>
           <a:p>
-            <a:pPr>
+            <a:pPr marL="274638" indent="-274638">
+              <a:lnSpc>
+                <a:spcPct val="108000"/>
+              </a:lnSpc>
               <a:spcAft>
-                <a:spcPts val="900"/>
+                <a:spcPts val="1100"/>
               </a:spcAft>
+              <a:buClr>
+                <a:srgbClr val="1B3A5B"/>
+              </a:buClr>
+              <a:buFont typeface="Arial"/>
+              <a:buChar char="•"/>
             </a:pPr>
             <a:r>
               <a:rPr sz="1700" b="1" i="0">
@@ -10906,7 +11151,7 @@
                 </a:solidFill>
                 <a:latin typeface="Arial"/>
               </a:rPr>
-              <a:t>•  Your name, your specialty,</a:t>
+              <a:t>Your name, your specialty,</a:t>
             </a:r>
             <a:r>
               <a:rPr sz="1700" b="0" i="0">
@@ -10919,10 +11164,18 @@
             </a:r>
           </a:p>
           <a:p>
-            <a:pPr>
+            <a:pPr marL="274638" indent="-274638">
+              <a:lnSpc>
+                <a:spcPct val="108000"/>
+              </a:lnSpc>
               <a:spcAft>
-                <a:spcPts val="900"/>
+                <a:spcPts val="1100"/>
               </a:spcAft>
+              <a:buClr>
+                <a:srgbClr val="1B3A5B"/>
+              </a:buClr>
+              <a:buFont typeface="Arial"/>
+              <a:buChar char="•"/>
             </a:pPr>
             <a:r>
               <a:rPr sz="1700" b="1" i="0">
@@ -10931,7 +11184,7 @@
                 </a:solidFill>
                 <a:latin typeface="Arial"/>
               </a:rPr>
-              <a:t>•  One word</a:t>
+              <a:t>One word</a:t>
             </a:r>
             <a:r>
               <a:rPr sz="1700" b="0" i="0">
@@ -10944,10 +11197,18 @@
             </a:r>
           </a:p>
           <a:p>
-            <a:pPr>
+            <a:pPr marL="274638" indent="-274638">
+              <a:lnSpc>
+                <a:spcPct val="108000"/>
+              </a:lnSpc>
               <a:spcAft>
-                <a:spcPts val="900"/>
+                <a:spcPts val="1100"/>
               </a:spcAft>
+              <a:buClr>
+                <a:srgbClr val="1B3A5B"/>
+              </a:buClr>
+              <a:buFont typeface="Arial"/>
+              <a:buChar char="•"/>
             </a:pPr>
             <a:r>
               <a:rPr sz="1700" b="1" i="0">
@@ -10956,7 +11217,7 @@
                 </a:solidFill>
                 <a:latin typeface="Arial"/>
               </a:rPr>
-              <a:t>•  If there's time:</a:t>
+              <a:t>If there's time:</a:t>
             </a:r>
             <a:r>
               <a:rPr sz="1700" b="0" i="0">
@@ -11033,7 +11294,7 @@
                 </a:solidFill>
                 <a:latin typeface="Arial"/>
               </a:rPr>
-              <a:t>Hold on to your one word — you'll need it when we come back.</a:t>
+              <a:t>Hold on to your one word; you'll need it when we come back.</a:t>
             </a:r>
           </a:p>
         </p:txBody>
@@ -11091,7 +11352,7 @@
                 </a:solidFill>
                 <a:latin typeface="Georgia"/>
               </a:rPr>
-              <a:t>Thrive 55+ · Kickoff Webinar</a:t>
+              <a:t>© 2026 Sue Adair · Thrive 55+ Nursing Advantage™</a:t>
             </a:r>
           </a:p>
         </p:txBody>
@@ -11310,7 +11571,7 @@
                 </a:solidFill>
                 <a:latin typeface="Arial"/>
               </a:rPr>
-              <a:t>Type your one word for how work feels right now — and then just watch the screen for a moment.</a:t>
+              <a:t>Type your one word for how work feels right now, and then just watch the screen for a moment.</a:t>
             </a:r>
           </a:p>
         </p:txBody>
@@ -11378,7 +11639,7 @@
                 </a:solidFill>
                 <a:latin typeface="Arial"/>
               </a:rPr>
-              <a:t>Look at those words. Whatever yours was — you are not the only one.</a:t>
+              <a:t>Look at those words. Whatever yours was, you are not the only one.</a:t>
             </a:r>
           </a:p>
         </p:txBody>
@@ -11412,7 +11673,7 @@
                 </a:solidFill>
                 <a:latin typeface="Georgia"/>
               </a:rPr>
-              <a:t>Thrive 55+ · Kickoff Webinar</a:t>
+              <a:t>© 2026 Sue Adair · Thrive 55+ Nursing Advantage™</a:t>
             </a:r>
           </a:p>
         </p:txBody>
@@ -11650,7 +11911,7 @@
             <a:r>
               <a:rPr sz="2400" b="1" i="0">
                 <a:solidFill>
-                  <a:srgbClr val="187878"/>
+                  <a:srgbClr val="1B3A5B"/>
                 </a:solidFill>
                 <a:latin typeface="Georgia"/>
               </a:rPr>
@@ -11675,7 +11936,7 @@
             <a:r>
               <a:rPr sz="1400" b="1" i="0">
                 <a:solidFill>
-                  <a:srgbClr val="0F5F5F"/>
+                  <a:srgbClr val="187878"/>
                 </a:solidFill>
                 <a:latin typeface="Arial"/>
               </a:rPr>
@@ -11695,7 +11956,7 @@
                 </a:solidFill>
                 <a:latin typeface="Arial"/>
               </a:rPr>
-              <a:t>Score your body load, interruption load, and change load from 1–10. Strain isn't weakness — it's information.</a:t>
+              <a:t>Score your body load, interruption load, and change load from 1–10. Strain isn't weakness; it's information.</a:t>
             </a:r>
           </a:p>
         </p:txBody>
@@ -11748,7 +12009,7 @@
             <a:r>
               <a:rPr sz="2400" b="1" i="0">
                 <a:solidFill>
-                  <a:srgbClr val="187878"/>
+                  <a:srgbClr val="1B3A5B"/>
                 </a:solidFill>
                 <a:latin typeface="Georgia"/>
               </a:rPr>
@@ -11773,7 +12034,7 @@
             <a:r>
               <a:rPr sz="1400" b="1" i="0">
                 <a:solidFill>
-                  <a:srgbClr val="0F5F5F"/>
+                  <a:srgbClr val="187878"/>
                 </a:solidFill>
                 <a:latin typeface="Arial"/>
               </a:rPr>
@@ -11846,7 +12107,7 @@
             <a:r>
               <a:rPr sz="2400" b="1" i="0">
                 <a:solidFill>
-                  <a:srgbClr val="187878"/>
+                  <a:srgbClr val="1B3A5B"/>
                 </a:solidFill>
                 <a:latin typeface="Georgia"/>
               </a:rPr>
@@ -11871,7 +12132,7 @@
             <a:r>
               <a:rPr sz="1400" b="1" i="0">
                 <a:solidFill>
-                  <a:srgbClr val="0F5F5F"/>
+                  <a:srgbClr val="187878"/>
                 </a:solidFill>
                 <a:latin typeface="Arial"/>
               </a:rPr>
@@ -11925,7 +12186,7 @@
                 </a:solidFill>
                 <a:latin typeface="Arial"/>
               </a:rPr>
-              <a:t>Not one decision made in a panic — a method you can learn, repeat, and walk with a cohort beside you.</a:t>
+              <a:t>Not one decision made in a panic, but a method you can learn, repeat, and walk with a cohort beside you.</a:t>
             </a:r>
           </a:p>
         </p:txBody>
@@ -11959,7 +12220,7 @@
                 </a:solidFill>
                 <a:latin typeface="Georgia"/>
               </a:rPr>
-              <a:t>Thrive 55+ · Kickoff Webinar</a:t>
+              <a:t>© 2026 Sue Adair · Thrive 55+ Nursing Advantage™</a:t>
             </a:r>
           </a:p>
         </p:txBody>
@@ -12171,10 +12432,18 @@
           </a:bodyPr>
           <a:lstStyle/>
           <a:p>
-            <a:pPr>
+            <a:pPr marL="274638" indent="-274638">
+              <a:lnSpc>
+                <a:spcPct val="108000"/>
+              </a:lnSpc>
               <a:spcAft>
-                <a:spcPts val="800"/>
+                <a:spcPts val="1100"/>
               </a:spcAft>
+              <a:buClr>
+                <a:srgbClr val="1B3A5B"/>
+              </a:buClr>
+              <a:buFont typeface="Arial"/>
+              <a:buChar char="•"/>
             </a:pPr>
             <a:r>
               <a:rPr sz="1700" b="1" i="0">
@@ -12183,7 +12452,7 @@
                 </a:solidFill>
                 <a:latin typeface="Arial"/>
               </a:rPr>
-              <a:t>•  Body load</a:t>
+              <a:t>Body load</a:t>
             </a:r>
             <a:r>
               <a:rPr sz="1700" b="0" i="0">
@@ -12192,14 +12461,22 @@
                 </a:solidFill>
                 <a:latin typeface="Arial"/>
               </a:rPr>
-              <a:t> — lifting, standing, transferring, needing longer to recover</a:t>
-            </a:r>
-          </a:p>
-          <a:p>
-            <a:pPr>
+              <a:t>: lifting, standing, transferring, needing longer to recover</a:t>
+            </a:r>
+          </a:p>
+          <a:p>
+            <a:pPr marL="274638" indent="-274638">
+              <a:lnSpc>
+                <a:spcPct val="108000"/>
+              </a:lnSpc>
               <a:spcAft>
-                <a:spcPts val="800"/>
+                <a:spcPts val="1100"/>
               </a:spcAft>
+              <a:buClr>
+                <a:srgbClr val="1B3A5B"/>
+              </a:buClr>
+              <a:buFont typeface="Arial"/>
+              <a:buChar char="•"/>
             </a:pPr>
             <a:r>
               <a:rPr sz="1700" b="1" i="0">
@@ -12208,7 +12485,7 @@
                 </a:solidFill>
                 <a:latin typeface="Arial"/>
               </a:rPr>
-              <a:t>•  Interruption load</a:t>
+              <a:t>Interruption load</a:t>
             </a:r>
             <a:r>
               <a:rPr sz="1700" b="0" i="0">
@@ -12217,14 +12494,22 @@
                 </a:solidFill>
                 <a:latin typeface="Arial"/>
               </a:rPr>
-              <a:t> — alarms, call lights, open mental loops, constant task-switching</a:t>
-            </a:r>
-          </a:p>
-          <a:p>
-            <a:pPr>
+              <a:t>: alarms, call lights, open mental loops, constant task-switching</a:t>
+            </a:r>
+          </a:p>
+          <a:p>
+            <a:pPr marL="274638" indent="-274638">
+              <a:lnSpc>
+                <a:spcPct val="108000"/>
+              </a:lnSpc>
               <a:spcAft>
-                <a:spcPts val="800"/>
+                <a:spcPts val="1100"/>
               </a:spcAft>
+              <a:buClr>
+                <a:srgbClr val="1B3A5B"/>
+              </a:buClr>
+              <a:buFont typeface="Arial"/>
+              <a:buChar char="•"/>
             </a:pPr>
             <a:r>
               <a:rPr sz="1700" b="1" i="0">
@@ -12233,7 +12518,7 @@
                 </a:solidFill>
                 <a:latin typeface="Arial"/>
               </a:rPr>
-              <a:t>•  Change load</a:t>
+              <a:t>Change load</a:t>
             </a:r>
             <a:r>
               <a:rPr sz="1700" b="0" i="0">
@@ -12242,7 +12527,7 @@
                 </a:solidFill>
                 <a:latin typeface="Arial"/>
               </a:rPr>
-              <a:t> — new systems and expectations, learned at full speed</a:t>
+              <a:t>: new systems and expectations, learned at full speed</a:t>
             </a:r>
           </a:p>
         </p:txBody>
@@ -12299,7 +12584,7 @@
                 </a:solidFill>
                 <a:latin typeface="Arial"/>
               </a:rPr>
-              <a:t>IN THE CHAT — OR POLL 2</a:t>
+              <a:t>IN THE CHAT · OR POLL 2</a:t>
             </a:r>
           </a:p>
           <a:p>
@@ -12344,7 +12629,7 @@
                 </a:solidFill>
                 <a:latin typeface="Georgia"/>
               </a:rPr>
-              <a:t>Thrive 55+ · Kickoff Webinar</a:t>
+              <a:t>© 2026 Sue Adair · Thrive 55+ Nursing Advantage™</a:t>
             </a:r>
           </a:p>
         </p:txBody>
